--- a/docs/Vehicle Detection.pptx
+++ b/docs/Vehicle Detection.pptx
@@ -125,6 +125,7 @@
 <file path=ppt/revisionInfo.xml><?xml version="1.0" encoding="utf-8"?>
 <p1510:revInfo xmlns:a="http://schemas.openxmlformats.org/drawingml/2006/main" xmlns:r="http://schemas.openxmlformats.org/officeDocument/2006/relationships" xmlns:p1510="http://schemas.microsoft.com/office/powerpoint/2015/10/main">
   <p1510:revLst>
+    <p1510:client id="{030EF007-64B9-4627-8D50-3FB1C78528E2}" v="4" dt="2026-07-17T14:22:48.107"/>
     <p1510:client id="{92C5D52A-A230-64DF-9CBC-4EE473BBA438}" v="29" dt="2026-07-16T22:19:31.568"/>
     <p1510:client id="{A301AEB8-28E7-5D2D-9AE3-675615391D58}" v="230" dt="2026-07-16T20:30:15.952"/>
     <p1510:client id="{D27F42AD-78AC-C8B9-2FB2-5CC69E53A38B}" v="180" dt="2026-07-16T21:08:28.977"/>
@@ -5194,62 +5195,10 @@
               </a:rPr>
               <a:t>Normalizacija</a:t>
             </a:r>
-            <a:endParaRPr lang="en-US">
+            <a:endParaRPr lang="en-US" dirty="0" err="1">
               <a:ea typeface="+mn-lt"/>
               <a:cs typeface="+mn-lt"/>
             </a:endParaRPr>
-          </a:p>
-          <a:p>
-            <a:r>
-              <a:rPr lang="en-US" b="1" dirty="0" err="1">
-                <a:ea typeface="+mn-lt"/>
-                <a:cs typeface="+mn-lt"/>
-              </a:rPr>
-              <a:t>Augmentacija</a:t>
-            </a:r>
-            <a:r>
-              <a:rPr lang="en-US" b="1" dirty="0">
-                <a:ea typeface="+mn-lt"/>
-                <a:cs typeface="+mn-lt"/>
-              </a:rPr>
-              <a:t> </a:t>
-            </a:r>
-            <a:r>
-              <a:rPr lang="en-US" dirty="0" err="1">
-                <a:ea typeface="+mn-lt"/>
-                <a:cs typeface="+mn-lt"/>
-              </a:rPr>
-              <a:t>trening</a:t>
-            </a:r>
-            <a:r>
-              <a:rPr lang="en-US" dirty="0">
-                <a:ea typeface="+mn-lt"/>
-                <a:cs typeface="+mn-lt"/>
-              </a:rPr>
-              <a:t> </a:t>
-            </a:r>
-            <a:r>
-              <a:rPr lang="en-US" dirty="0" err="1">
-                <a:ea typeface="+mn-lt"/>
-                <a:cs typeface="+mn-lt"/>
-              </a:rPr>
-              <a:t>skupa</a:t>
-            </a:r>
-            <a:r>
-              <a:rPr lang="en-US" dirty="0">
-                <a:ea typeface="+mn-lt"/>
-                <a:cs typeface="+mn-lt"/>
-              </a:rPr>
-              <a:t> </a:t>
-            </a:r>
-            <a:endParaRPr lang="en-US"/>
-          </a:p>
-          <a:p>
-            <a:pPr>
-              <a:buFont typeface="Calibri" panose="020B0604020202020204" pitchFamily="34" charset="0"/>
-              <a:buChar char="-"/>
-            </a:pPr>
-            <a:endParaRPr lang="en-US" dirty="0"/>
           </a:p>
         </p:txBody>
       </p:sp>
